--- a/ゲーム科3年/00_前期/ゲームエンジンⅤ/11_GameInstance.pptx
+++ b/ゲーム科3年/00_前期/ゲームエンジンⅤ/11_GameInstance.pptx
@@ -273,7 +273,7 @@
           <a:p>
             <a:fld id="{E9CC885B-4903-4D54-9A93-00025F12DED9}" type="datetimeFigureOut">
               <a:rPr kumimoji="1" lang="ja-JP" altLang="en-US" smtClean="0"/>
-              <a:t>2025/2/7</a:t>
+              <a:t>2025/11/7</a:t>
             </a:fld>
             <a:endParaRPr kumimoji="1" lang="ja-JP" altLang="en-US"/>
           </a:p>
@@ -503,7 +503,7 @@
           <a:p>
             <a:fld id="{E9CC885B-4903-4D54-9A93-00025F12DED9}" type="datetimeFigureOut">
               <a:rPr kumimoji="1" lang="ja-JP" altLang="en-US" smtClean="0"/>
-              <a:t>2025/2/7</a:t>
+              <a:t>2025/11/7</a:t>
             </a:fld>
             <a:endParaRPr kumimoji="1" lang="ja-JP" altLang="en-US"/>
           </a:p>
@@ -743,7 +743,7 @@
           <a:p>
             <a:fld id="{E9CC885B-4903-4D54-9A93-00025F12DED9}" type="datetimeFigureOut">
               <a:rPr kumimoji="1" lang="ja-JP" altLang="en-US" smtClean="0"/>
-              <a:t>2025/2/7</a:t>
+              <a:t>2025/11/7</a:t>
             </a:fld>
             <a:endParaRPr kumimoji="1" lang="ja-JP" altLang="en-US"/>
           </a:p>
@@ -973,7 +973,7 @@
           <a:p>
             <a:fld id="{E9CC885B-4903-4D54-9A93-00025F12DED9}" type="datetimeFigureOut">
               <a:rPr kumimoji="1" lang="ja-JP" altLang="en-US" smtClean="0"/>
-              <a:t>2025/2/7</a:t>
+              <a:t>2025/11/7</a:t>
             </a:fld>
             <a:endParaRPr kumimoji="1" lang="ja-JP" altLang="en-US"/>
           </a:p>
@@ -1248,7 +1248,7 @@
           <a:p>
             <a:fld id="{E9CC885B-4903-4D54-9A93-00025F12DED9}" type="datetimeFigureOut">
               <a:rPr kumimoji="1" lang="ja-JP" altLang="en-US" smtClean="0"/>
-              <a:t>2025/2/7</a:t>
+              <a:t>2025/11/7</a:t>
             </a:fld>
             <a:endParaRPr kumimoji="1" lang="ja-JP" altLang="en-US"/>
           </a:p>
@@ -1577,7 +1577,7 @@
           <a:p>
             <a:fld id="{E9CC885B-4903-4D54-9A93-00025F12DED9}" type="datetimeFigureOut">
               <a:rPr kumimoji="1" lang="ja-JP" altLang="en-US" smtClean="0"/>
-              <a:t>2025/2/7</a:t>
+              <a:t>2025/11/7</a:t>
             </a:fld>
             <a:endParaRPr kumimoji="1" lang="ja-JP" altLang="en-US"/>
           </a:p>
@@ -2053,7 +2053,7 @@
           <a:p>
             <a:fld id="{E9CC885B-4903-4D54-9A93-00025F12DED9}" type="datetimeFigureOut">
               <a:rPr kumimoji="1" lang="ja-JP" altLang="en-US" smtClean="0"/>
-              <a:t>2025/2/7</a:t>
+              <a:t>2025/11/7</a:t>
             </a:fld>
             <a:endParaRPr kumimoji="1" lang="ja-JP" altLang="en-US"/>
           </a:p>
@@ -2194,7 +2194,7 @@
           <a:p>
             <a:fld id="{E9CC885B-4903-4D54-9A93-00025F12DED9}" type="datetimeFigureOut">
               <a:rPr kumimoji="1" lang="ja-JP" altLang="en-US" smtClean="0"/>
-              <a:t>2025/2/7</a:t>
+              <a:t>2025/11/7</a:t>
             </a:fld>
             <a:endParaRPr kumimoji="1" lang="ja-JP" altLang="en-US"/>
           </a:p>
@@ -2307,7 +2307,7 @@
           <a:p>
             <a:fld id="{E9CC885B-4903-4D54-9A93-00025F12DED9}" type="datetimeFigureOut">
               <a:rPr kumimoji="1" lang="ja-JP" altLang="en-US" smtClean="0"/>
-              <a:t>2025/2/7</a:t>
+              <a:t>2025/11/7</a:t>
             </a:fld>
             <a:endParaRPr kumimoji="1" lang="ja-JP" altLang="en-US"/>
           </a:p>
@@ -2650,7 +2650,7 @@
           <a:p>
             <a:fld id="{E9CC885B-4903-4D54-9A93-00025F12DED9}" type="datetimeFigureOut">
               <a:rPr kumimoji="1" lang="ja-JP" altLang="en-US" smtClean="0"/>
-              <a:t>2025/2/7</a:t>
+              <a:t>2025/11/7</a:t>
             </a:fld>
             <a:endParaRPr kumimoji="1" lang="ja-JP" altLang="en-US"/>
           </a:p>
@@ -2938,7 +2938,7 @@
           <a:p>
             <a:fld id="{E9CC885B-4903-4D54-9A93-00025F12DED9}" type="datetimeFigureOut">
               <a:rPr kumimoji="1" lang="ja-JP" altLang="en-US" smtClean="0"/>
-              <a:t>2025/2/7</a:t>
+              <a:t>2025/11/7</a:t>
             </a:fld>
             <a:endParaRPr kumimoji="1" lang="ja-JP" altLang="en-US"/>
           </a:p>
@@ -3211,7 +3211,7 @@
           <a:p>
             <a:fld id="{E9CC885B-4903-4D54-9A93-00025F12DED9}" type="datetimeFigureOut">
               <a:rPr kumimoji="1" lang="ja-JP" altLang="en-US" smtClean="0"/>
-              <a:t>2025/2/7</a:t>
+              <a:t>2025/11/7</a:t>
             </a:fld>
             <a:endParaRPr kumimoji="1" lang="ja-JP" altLang="en-US"/>
           </a:p>
@@ -6404,7 +6404,7 @@
         <p:spPr>
           <a:xfrm>
             <a:off x="567541" y="4227606"/>
-            <a:ext cx="9179116" cy="1569660"/>
+            <a:ext cx="10451900" cy="1938992"/>
           </a:xfrm>
           <a:prstGeom prst="rect">
             <a:avLst/>
@@ -6481,6 +6481,21 @@
             <a:r>
               <a:rPr lang="ja-JP" altLang="en-US" sz="2400" dirty="0"/>
               <a:t>が必要です。</a:t>
+            </a:r>
+            <a:endParaRPr lang="en-US" altLang="ja-JP" sz="2400" dirty="0"/>
+          </a:p>
+          <a:p>
+            <a:r>
+              <a:rPr kumimoji="1" lang="ja-JP" altLang="en-US" sz="2400" dirty="0"/>
+              <a:t>スマートポインタを使うのもありです。（その場合は</a:t>
+            </a:r>
+            <a:r>
+              <a:rPr kumimoji="1" lang="en-US" altLang="ja-JP" sz="2400" dirty="0"/>
+              <a:t>UE</a:t>
+            </a:r>
+            <a:r>
+              <a:rPr kumimoji="1" lang="ja-JP" altLang="en-US" sz="2400" dirty="0"/>
+              <a:t>専用のものあり）</a:t>
             </a:r>
             <a:endParaRPr kumimoji="1" lang="en-US" altLang="ja-JP" sz="2400" dirty="0"/>
           </a:p>
